--- a/slides/trust_gate_deck.pptx
+++ b/slides/trust_gate_deck.pptx
@@ -7390,7 +7390,7 @@
                   <a:srgbClr val="FFFFFF"/>
                 </a:solidFill>
               </a:rPr>
-              <a:t>Result 1 — Injection Robustness on Cora</a:t>
+              <a:t>Result 1 — Injection Robustness (Cora + PubMed)</a:t>
             </a:r>
           </a:p>
         </p:txBody>
@@ -7424,7 +7424,7 @@
                   <a:srgbClr val="D6BCFA"/>
                 </a:solidFill>
               </a:rPr>
-              <a:t>B (confidence) degrades least: only −3.6 pp at 50% injection</a:t>
+              <a:t>Gate B most robust on both datasets: −3.6 pp (Cora), −2.6 pp (PubMed)</a:t>
             </a:r>
           </a:p>
         </p:txBody>
@@ -7446,7 +7446,7 @@
         <p:spPr>
           <a:xfrm>
             <a:off x="274320" y="1143000"/>
-            <a:ext cx="8046720" cy="3969153"/>
+            <a:ext cx="8686800" cy="4035847"/>
           </a:xfrm>
           <a:prstGeom prst="rect">
             <a:avLst/>
@@ -7461,8 +7461,8 @@
         </p:nvSpPr>
         <p:spPr>
           <a:xfrm>
-            <a:off x="8503920" y="1143000"/>
-            <a:ext cx="3474720" cy="5394960"/>
+            <a:off x="9098280" y="1143000"/>
+            <a:ext cx="2880360" cy="5394960"/>
           </a:xfrm>
           <a:prstGeom prst="rect">
             <a:avLst/>
@@ -7506,8 +7506,8 @@
         </p:nvSpPr>
         <p:spPr>
           <a:xfrm>
-            <a:off x="8595360" y="1234440"/>
-            <a:ext cx="3291840" cy="457200"/>
+            <a:off x="9189720" y="1234440"/>
+            <a:ext cx="2697480" cy="457200"/>
           </a:xfrm>
           <a:prstGeom prst="rect">
             <a:avLst/>
@@ -7540,8 +7540,8 @@
         </p:nvSpPr>
         <p:spPr>
           <a:xfrm>
-            <a:off x="8595360" y="1783080"/>
-            <a:ext cx="3291840" cy="914400"/>
+            <a:off x="9189720" y="1783080"/>
+            <a:ext cx="2697480" cy="914400"/>
           </a:xfrm>
           <a:prstGeom prst="rect">
             <a:avLst/>
@@ -7556,12 +7556,12 @@
           <a:p>
             <a:pPr algn="l"/>
             <a:r>
-              <a:rPr sz="1150" b="0" i="0">
+              <a:rPr sz="1100" b="0" i="0">
                 <a:solidFill>
                   <a:srgbClr val="1A202C"/>
                 </a:solidFill>
               </a:rPr>
-              <a:t>• Gate B (confidence) most robust: −3.6 pp</a:t>
+              <a:t>• B (confidence) most robust on both Cora (−3.6) and PubMed (−2.6 pp)</a:t>
             </a:r>
           </a:p>
         </p:txBody>
@@ -7574,8 +7574,8 @@
         </p:nvSpPr>
         <p:spPr>
           <a:xfrm>
-            <a:off x="8595360" y="2788920"/>
-            <a:ext cx="3291840" cy="914400"/>
+            <a:off x="9189720" y="2788920"/>
+            <a:ext cx="2697480" cy="914400"/>
           </a:xfrm>
           <a:prstGeom prst="rect">
             <a:avLst/>
@@ -7590,12 +7590,12 @@
           <a:p>
             <a:pPr algn="l"/>
             <a:r>
-              <a:rPr sz="1150" b="0" i="0">
+              <a:rPr sz="1100" b="0" i="0">
                 <a:solidFill>
                   <a:srgbClr val="1A202C"/>
                 </a:solidFill>
               </a:rPr>
-              <a:t>• Cosine gates (A, D) track baseline — offer no extra robustness</a:t>
+              <a:t>• C (learned MLP) also stable: −5.9 pp Cora, −1.1 pp PubMed</a:t>
             </a:r>
           </a:p>
         </p:txBody>
@@ -7608,8 +7608,8 @@
         </p:nvSpPr>
         <p:spPr>
           <a:xfrm>
-            <a:off x="8595360" y="3794760"/>
-            <a:ext cx="3291840" cy="914400"/>
+            <a:off x="9189720" y="3794760"/>
+            <a:ext cx="2697480" cy="914400"/>
           </a:xfrm>
           <a:prstGeom prst="rect">
             <a:avLst/>
@@ -7624,12 +7624,12 @@
           <a:p>
             <a:pPr algn="l"/>
             <a:r>
-              <a:rPr sz="1150" b="0" i="0">
+              <a:rPr sz="1100" b="0" i="0">
                 <a:solidFill>
                   <a:srgbClr val="1A202C"/>
                 </a:solidFill>
               </a:rPr>
-              <a:t>• Gate C (learned) degrades faster than B</a:t>
+              <a:t>• Cosine gates (A, D): −8.4 pp — no robustness benefit</a:t>
             </a:r>
           </a:p>
         </p:txBody>
@@ -7642,8 +7642,8 @@
         </p:nvSpPr>
         <p:spPr>
           <a:xfrm>
-            <a:off x="8595360" y="4800600"/>
-            <a:ext cx="3291840" cy="914400"/>
+            <a:off x="9189720" y="4800600"/>
+            <a:ext cx="2697480" cy="914400"/>
           </a:xfrm>
           <a:prstGeom prst="rect">
             <a:avLst/>
@@ -7658,12 +7658,12 @@
           <a:p>
             <a:pPr algn="l"/>
             <a:r>
-              <a:rPr sz="1150" b="0" i="0">
+              <a:rPr sz="1100" b="0" i="0">
                 <a:solidFill>
                   <a:srgbClr val="1A202C"/>
                 </a:solidFill>
               </a:rPr>
-              <a:t>• All gates converge at 50% injection (≈71%)</a:t>
+              <a:t>• Pattern consistent across two independent datasets</a:t>
             </a:r>
           </a:p>
         </p:txBody>
@@ -7766,7 +7766,7 @@
                   <a:srgbClr val="FFFFFF"/>
                 </a:solidFill>
               </a:rPr>
-              <a:t>Result 2 — Heterophily Generalization on Texas</a:t>
+              <a:t>Result 2 — Heterophily Generalization (3 Datasets)</a:t>
             </a:r>
           </a:p>
         </p:txBody>
@@ -7800,7 +7800,7 @@
                   <a:srgbClr val="D6BCFA"/>
                 </a:solidFill>
               </a:rPr>
-              <a:t>Gates B &amp; C reach 81.1% — outperforming GraphSAGE by +4.5 pp</a:t>
+              <a:t>B &amp; C improve over baseline on ALL three datasets; cosine gates consistently hurt</a:t>
             </a:r>
           </a:p>
         </p:txBody>
@@ -7822,7 +7822,7 @@
         <p:spPr>
           <a:xfrm>
             <a:off x="274320" y="1143000"/>
-            <a:ext cx="8046720" cy="4252577"/>
+            <a:ext cx="8229600" cy="4358663"/>
           </a:xfrm>
           <a:prstGeom prst="rect">
             <a:avLst/>
@@ -7837,8 +7837,8 @@
         </p:nvSpPr>
         <p:spPr>
           <a:xfrm>
-            <a:off x="8503920" y="1143000"/>
-            <a:ext cx="3474720" cy="5394960"/>
+            <a:off x="8686800" y="1143000"/>
+            <a:ext cx="3291840" cy="5394960"/>
           </a:xfrm>
           <a:prstGeom prst="rect">
             <a:avLst/>
@@ -7882,8 +7882,8 @@
         </p:nvSpPr>
         <p:spPr>
           <a:xfrm>
-            <a:off x="8595360" y="1234440"/>
-            <a:ext cx="3291840" cy="457200"/>
+            <a:off x="8778240" y="1234440"/>
+            <a:ext cx="3108960" cy="457200"/>
           </a:xfrm>
           <a:prstGeom prst="rect">
             <a:avLst/>
@@ -7916,8 +7916,8 @@
         </p:nvSpPr>
         <p:spPr>
           <a:xfrm>
-            <a:off x="8595360" y="1783080"/>
-            <a:ext cx="3291840" cy="914400"/>
+            <a:off x="8778240" y="1783080"/>
+            <a:ext cx="3108960" cy="841248"/>
           </a:xfrm>
           <a:prstGeom prst="rect">
             <a:avLst/>
@@ -7932,12 +7932,12 @@
           <a:p>
             <a:pPr algn="l"/>
             <a:r>
-              <a:rPr sz="1150" b="0" i="0">
+              <a:rPr sz="1100" b="0" i="0">
                 <a:solidFill>
                   <a:srgbClr val="1A202C"/>
                 </a:solidFill>
               </a:rPr>
-              <a:t>• B &amp; C: 81.1% — best among our gates</a:t>
+              <a:t>• Texas:     B &amp; C → 81.1%  (+4.5 pp)</a:t>
             </a:r>
           </a:p>
         </p:txBody>
@@ -7950,8 +7950,8 @@
         </p:nvSpPr>
         <p:spPr>
           <a:xfrm>
-            <a:off x="8595360" y="2788920"/>
-            <a:ext cx="3291840" cy="914400"/>
+            <a:off x="8778240" y="2679191"/>
+            <a:ext cx="3108960" cy="841248"/>
           </a:xfrm>
           <a:prstGeom prst="rect">
             <a:avLst/>
@@ -7966,12 +7966,12 @@
           <a:p>
             <a:pPr algn="l"/>
             <a:r>
-              <a:rPr sz="1150" b="0" i="0">
+              <a:rPr sz="1100" b="0" i="0">
                 <a:solidFill>
                   <a:srgbClr val="1A202C"/>
                 </a:solidFill>
               </a:rPr>
-              <a:t>• A &amp; D (cosine) HURT vs. baseline: 58.6%, 60.4%</a:t>
+              <a:t>• Wisconsin: B &amp; C → 86.9%  (+5.9 pp)</a:t>
             </a:r>
           </a:p>
         </p:txBody>
@@ -7984,8 +7984,8 @@
         </p:nvSpPr>
         <p:spPr>
           <a:xfrm>
-            <a:off x="8595360" y="3794760"/>
-            <a:ext cx="3291840" cy="914400"/>
+            <a:off x="8778240" y="3575304"/>
+            <a:ext cx="3108960" cy="841248"/>
           </a:xfrm>
           <a:prstGeom prst="rect">
             <a:avLst/>
@@ -8000,12 +8000,12 @@
           <a:p>
             <a:pPr algn="l"/>
             <a:r>
-              <a:rPr sz="1150" b="0" i="0">
+              <a:rPr sz="1100" b="0" i="0">
                 <a:solidFill>
                   <a:srgbClr val="1A202C"/>
                 </a:solidFill>
               </a:rPr>
-              <a:t>• Cosine similarity ≠ class compatibility on heterophilic graphs</a:t>
+              <a:t>• Cornell:   B     → 76.6%  (+4.5 pp)</a:t>
             </a:r>
           </a:p>
         </p:txBody>
@@ -8018,8 +8018,8 @@
         </p:nvSpPr>
         <p:spPr>
           <a:xfrm>
-            <a:off x="8595360" y="4800600"/>
-            <a:ext cx="3291840" cy="914400"/>
+            <a:off x="8778240" y="4471416"/>
+            <a:ext cx="3108960" cy="841248"/>
           </a:xfrm>
           <a:prstGeom prst="rect">
             <a:avLst/>
@@ -8034,12 +8034,46 @@
           <a:p>
             <a:pPr algn="l"/>
             <a:r>
-              <a:rPr sz="1150" b="0" i="0">
+              <a:rPr sz="1100" b="0" i="0">
                 <a:solidFill>
                   <a:srgbClr val="1A202C"/>
                 </a:solidFill>
               </a:rPr>
-              <a:t>• Gap to GPR-GNN (92.9%) — specialist vs. general method</a:t>
+              <a:t>• Cosine gates (A, D) hurt on ALL three — drop 15–20 pp below baseline</a:t>
+            </a:r>
+          </a:p>
+        </p:txBody>
+      </p:sp>
+      <p:sp>
+        <p:nvSpPr>
+          <p:cNvPr id="12" name="TextBox 11"/>
+          <p:cNvSpPr txBox="1"/>
+          <p:nvPr/>
+        </p:nvSpPr>
+        <p:spPr>
+          <a:xfrm>
+            <a:off x="8778240" y="5367528"/>
+            <a:ext cx="3108960" cy="841248"/>
+          </a:xfrm>
+          <a:prstGeom prst="rect">
+            <a:avLst/>
+          </a:prstGeom>
+          <a:noFill/>
+        </p:spPr>
+        <p:txBody>
+          <a:bodyPr wrap="square">
+            <a:spAutoFit/>
+          </a:bodyPr>
+          <a:lstStyle/>
+          <a:p>
+            <a:pPr algn="l"/>
+            <a:r>
+              <a:rPr sz="1100" b="0" i="0">
+                <a:solidFill>
+                  <a:srgbClr val="1A202C"/>
+                </a:solidFill>
+              </a:rPr>
+              <a:t>• Confidence signal reliable regardless of graph structure</a:t>
             </a:r>
           </a:p>
         </p:txBody>
@@ -8198,7 +8232,7 @@
         <p:spPr>
           <a:xfrm>
             <a:off x="137160" y="1097280"/>
-            <a:ext cx="11887200" cy="3762462"/>
+            <a:ext cx="11887200" cy="2983757"/>
           </a:xfrm>
           <a:prstGeom prst="rect">
             <a:avLst/>

--- a/slides/trust_gate_deck.pptx
+++ b/slides/trust_gate_deck.pptx
@@ -14,6 +14,7 @@
     <p:sldId id="262" r:id="rId13"/>
     <p:sldId id="263" r:id="rId14"/>
     <p:sldId id="264" r:id="rId15"/>
+    <p:sldId id="265" r:id="rId16"/>
   </p:sldIdLst>
   <p:sldSz cx="12188952" cy="6858000" type="screen4x3"/>
   <p:notesSz cx="6858000" cy="9144000"/>
@@ -3488,6 +3489,917 @@
 </p:sld>
 </file>
 
+<file path=ppt/slides/slide10.xml><?xml version="1.0" encoding="utf-8"?>
+<p:sld xmlns:a="http://schemas.openxmlformats.org/drawingml/2006/main" xmlns:p="http://schemas.openxmlformats.org/presentationml/2006/main" xmlns:r="http://schemas.openxmlformats.org/officeDocument/2006/relationships">
+  <p:cSld>
+    <p:bg>
+      <p:bgPr>
+        <a:solidFill>
+          <a:srgbClr val="FFFFFF"/>
+        </a:solidFill>
+        <a:effectLst/>
+      </p:bgPr>
+    </p:bg>
+    <p:spTree>
+      <p:nvGrpSpPr>
+        <p:cNvPr id="1" name=""/>
+        <p:cNvGrpSpPr/>
+        <p:nvPr/>
+      </p:nvGrpSpPr>
+      <p:grpSpPr/>
+      <p:sp>
+        <p:nvSpPr>
+          <p:cNvPr id="2" name="Rectangle 1"/>
+          <p:cNvSpPr/>
+          <p:nvPr/>
+        </p:nvSpPr>
+        <p:spPr>
+          <a:xfrm>
+            <a:off x="0" y="0"/>
+            <a:ext cx="12188952" cy="1051560"/>
+          </a:xfrm>
+          <a:prstGeom prst="rect">
+            <a:avLst/>
+          </a:prstGeom>
+          <a:solidFill>
+            <a:srgbClr val="9C4221"/>
+          </a:solidFill>
+          <a:ln>
+            <a:noFill/>
+          </a:ln>
+        </p:spPr>
+        <p:style>
+          <a:lnRef idx="1">
+            <a:schemeClr val="accent1"/>
+          </a:lnRef>
+          <a:fillRef idx="3">
+            <a:schemeClr val="accent1"/>
+          </a:fillRef>
+          <a:effectRef idx="2">
+            <a:schemeClr val="accent1"/>
+          </a:effectRef>
+          <a:fontRef idx="minor">
+            <a:schemeClr val="lt1"/>
+          </a:fontRef>
+        </p:style>
+        <p:txBody>
+          <a:bodyPr rtlCol="0" anchor="ctr"/>
+          <a:lstStyle/>
+          <a:p>
+            <a:pPr algn="ctr"/>
+          </a:p>
+        </p:txBody>
+      </p:sp>
+      <p:sp>
+        <p:nvSpPr>
+          <p:cNvPr id="3" name="TextBox 2"/>
+          <p:cNvSpPr txBox="1"/>
+          <p:nvPr/>
+        </p:nvSpPr>
+        <p:spPr>
+          <a:xfrm>
+            <a:off x="365760" y="109728"/>
+            <a:ext cx="11430000" cy="640080"/>
+          </a:xfrm>
+          <a:prstGeom prst="rect">
+            <a:avLst/>
+          </a:prstGeom>
+          <a:noFill/>
+        </p:spPr>
+        <p:txBody>
+          <a:bodyPr wrap="square">
+            <a:spAutoFit/>
+          </a:bodyPr>
+          <a:lstStyle/>
+          <a:p>
+            <a:pPr algn="l"/>
+            <a:r>
+              <a:rPr sz="2800" b="1" i="0">
+                <a:solidFill>
+                  <a:srgbClr val="FFFFFF"/>
+                </a:solidFill>
+              </a:rPr>
+              <a:t>Research Direction &amp; Next Steps</a:t>
+            </a:r>
+          </a:p>
+        </p:txBody>
+      </p:sp>
+      <p:sp>
+        <p:nvSpPr>
+          <p:cNvPr id="4" name="Rectangle 3"/>
+          <p:cNvSpPr/>
+          <p:nvPr/>
+        </p:nvSpPr>
+        <p:spPr>
+          <a:xfrm>
+            <a:off x="182880" y="1188720"/>
+            <a:ext cx="3703320" cy="5029200"/>
+          </a:xfrm>
+          <a:prstGeom prst="rect">
+            <a:avLst/>
+          </a:prstGeom>
+          <a:solidFill>
+            <a:srgbClr val="EBF4FF"/>
+          </a:solidFill>
+          <a:ln w="19050">
+            <a:solidFill>
+              <a:srgbClr val="2B6CB0"/>
+            </a:solidFill>
+          </a:ln>
+        </p:spPr>
+        <p:style>
+          <a:lnRef idx="1">
+            <a:schemeClr val="accent1"/>
+          </a:lnRef>
+          <a:fillRef idx="3">
+            <a:schemeClr val="accent1"/>
+          </a:fillRef>
+          <a:effectRef idx="2">
+            <a:schemeClr val="accent1"/>
+          </a:effectRef>
+          <a:fontRef idx="minor">
+            <a:schemeClr val="lt1"/>
+          </a:fontRef>
+        </p:style>
+        <p:txBody>
+          <a:bodyPr rtlCol="0" anchor="ctr"/>
+          <a:lstStyle/>
+          <a:p>
+            <a:pPr algn="ctr"/>
+          </a:p>
+        </p:txBody>
+      </p:sp>
+      <p:sp>
+        <p:nvSpPr>
+          <p:cNvPr id="5" name="Rectangle 4"/>
+          <p:cNvSpPr/>
+          <p:nvPr/>
+        </p:nvSpPr>
+        <p:spPr>
+          <a:xfrm>
+            <a:off x="182880" y="1188720"/>
+            <a:ext cx="3703320" cy="457200"/>
+          </a:xfrm>
+          <a:prstGeom prst="rect">
+            <a:avLst/>
+          </a:prstGeom>
+          <a:solidFill>
+            <a:srgbClr val="2B6CB0"/>
+          </a:solidFill>
+          <a:ln>
+            <a:noFill/>
+          </a:ln>
+        </p:spPr>
+        <p:style>
+          <a:lnRef idx="1">
+            <a:schemeClr val="accent1"/>
+          </a:lnRef>
+          <a:fillRef idx="3">
+            <a:schemeClr val="accent1"/>
+          </a:fillRef>
+          <a:effectRef idx="2">
+            <a:schemeClr val="accent1"/>
+          </a:effectRef>
+          <a:fontRef idx="minor">
+            <a:schemeClr val="lt1"/>
+          </a:fontRef>
+        </p:style>
+        <p:txBody>
+          <a:bodyPr rtlCol="0" anchor="ctr"/>
+          <a:lstStyle/>
+          <a:p>
+            <a:pPr algn="ctr"/>
+          </a:p>
+        </p:txBody>
+      </p:sp>
+      <p:sp>
+        <p:nvSpPr>
+          <p:cNvPr id="6" name="TextBox 5"/>
+          <p:cNvSpPr txBox="1"/>
+          <p:nvPr/>
+        </p:nvSpPr>
+        <p:spPr>
+          <a:xfrm>
+            <a:off x="256032" y="1225296"/>
+            <a:ext cx="3547872" cy="411480"/>
+          </a:xfrm>
+          <a:prstGeom prst="rect">
+            <a:avLst/>
+          </a:prstGeom>
+          <a:noFill/>
+        </p:spPr>
+        <p:txBody>
+          <a:bodyPr wrap="square">
+            <a:spAutoFit/>
+          </a:bodyPr>
+          <a:lstStyle/>
+          <a:p>
+            <a:pPr algn="l"/>
+            <a:r>
+              <a:rPr sz="1200" b="1" i="0">
+                <a:solidFill>
+                  <a:srgbClr val="FFFFFF"/>
+                </a:solidFill>
+              </a:rPr>
+              <a:t>Short term — Strengthen experiments</a:t>
+            </a:r>
+          </a:p>
+        </p:txBody>
+      </p:sp>
+      <p:sp>
+        <p:nvSpPr>
+          <p:cNvPr id="7" name="TextBox 6"/>
+          <p:cNvSpPr txBox="1"/>
+          <p:nvPr/>
+        </p:nvSpPr>
+        <p:spPr>
+          <a:xfrm>
+            <a:off x="292608" y="1810512"/>
+            <a:ext cx="3511296" cy="713232"/>
+          </a:xfrm>
+          <a:prstGeom prst="rect">
+            <a:avLst/>
+          </a:prstGeom>
+          <a:noFill/>
+        </p:spPr>
+        <p:txBody>
+          <a:bodyPr wrap="square">
+            <a:spAutoFit/>
+          </a:bodyPr>
+          <a:lstStyle/>
+          <a:p>
+            <a:pPr algn="l"/>
+            <a:r>
+              <a:rPr sz="1150" b="0" i="0">
+                <a:solidFill>
+                  <a:srgbClr val="1A202C"/>
+                </a:solidFill>
+              </a:rPr>
+              <a:t>• Run PubMed + WikiCS injection sweeps</a:t>
+            </a:r>
+          </a:p>
+        </p:txBody>
+      </p:sp>
+      <p:sp>
+        <p:nvSpPr>
+          <p:cNvPr id="8" name="TextBox 7"/>
+          <p:cNvSpPr txBox="1"/>
+          <p:nvPr/>
+        </p:nvSpPr>
+        <p:spPr>
+          <a:xfrm>
+            <a:off x="292608" y="2560320"/>
+            <a:ext cx="3511296" cy="713232"/>
+          </a:xfrm>
+          <a:prstGeom prst="rect">
+            <a:avLst/>
+          </a:prstGeom>
+          <a:noFill/>
+        </p:spPr>
+        <p:txBody>
+          <a:bodyPr wrap="square">
+            <a:spAutoFit/>
+          </a:bodyPr>
+          <a:lstStyle/>
+          <a:p>
+            <a:pPr algn="l"/>
+            <a:r>
+              <a:rPr sz="1150" b="0" i="0">
+                <a:solidFill>
+                  <a:srgbClr val="1A202C"/>
+                </a:solidFill>
+              </a:rPr>
+              <a:t>• Wisconsin &amp; Cornell heterophily benchmarks</a:t>
+            </a:r>
+          </a:p>
+        </p:txBody>
+      </p:sp>
+      <p:sp>
+        <p:nvSpPr>
+          <p:cNvPr id="9" name="TextBox 8"/>
+          <p:cNvSpPr txBox="1"/>
+          <p:nvPr/>
+        </p:nvSpPr>
+        <p:spPr>
+          <a:xfrm>
+            <a:off x="292608" y="3310128"/>
+            <a:ext cx="3511296" cy="713232"/>
+          </a:xfrm>
+          <a:prstGeom prst="rect">
+            <a:avLst/>
+          </a:prstGeom>
+          <a:noFill/>
+        </p:spPr>
+        <p:txBody>
+          <a:bodyPr wrap="square">
+            <a:spAutoFit/>
+          </a:bodyPr>
+          <a:lstStyle/>
+          <a:p>
+            <a:pPr algn="l"/>
+            <a:r>
+              <a:rPr sz="1150" b="0" i="0">
+                <a:solidFill>
+                  <a:srgbClr val="1A202C"/>
+                </a:solidFill>
+              </a:rPr>
+              <a:t>• Add GNNGuard as an active baseline in our injection setup</a:t>
+            </a:r>
+          </a:p>
+        </p:txBody>
+      </p:sp>
+      <p:sp>
+        <p:nvSpPr>
+          <p:cNvPr id="10" name="TextBox 9"/>
+          <p:cNvSpPr txBox="1"/>
+          <p:nvPr/>
+        </p:nvSpPr>
+        <p:spPr>
+          <a:xfrm>
+            <a:off x="292608" y="4059935"/>
+            <a:ext cx="3511296" cy="713232"/>
+          </a:xfrm>
+          <a:prstGeom prst="rect">
+            <a:avLst/>
+          </a:prstGeom>
+          <a:noFill/>
+        </p:spPr>
+        <p:txBody>
+          <a:bodyPr wrap="square">
+            <a:spAutoFit/>
+          </a:bodyPr>
+          <a:lstStyle/>
+          <a:p>
+            <a:pPr algn="l"/>
+            <a:r>
+              <a:rPr sz="1150" b="0" i="0">
+                <a:solidFill>
+                  <a:srgbClr val="1A202C"/>
+                </a:solidFill>
+              </a:rPr>
+              <a:t>• Report mean ± std over 5 seeds</a:t>
+            </a:r>
+          </a:p>
+        </p:txBody>
+      </p:sp>
+      <p:sp>
+        <p:nvSpPr>
+          <p:cNvPr id="11" name="Rectangle 10"/>
+          <p:cNvSpPr/>
+          <p:nvPr/>
+        </p:nvSpPr>
+        <p:spPr>
+          <a:xfrm>
+            <a:off x="4206240" y="1188720"/>
+            <a:ext cx="3703320" cy="5029200"/>
+          </a:xfrm>
+          <a:prstGeom prst="rect">
+            <a:avLst/>
+          </a:prstGeom>
+          <a:solidFill>
+            <a:srgbClr val="FAF5FF"/>
+          </a:solidFill>
+          <a:ln w="19050">
+            <a:solidFill>
+              <a:srgbClr val="553C9A"/>
+            </a:solidFill>
+          </a:ln>
+        </p:spPr>
+        <p:style>
+          <a:lnRef idx="1">
+            <a:schemeClr val="accent1"/>
+          </a:lnRef>
+          <a:fillRef idx="3">
+            <a:schemeClr val="accent1"/>
+          </a:fillRef>
+          <a:effectRef idx="2">
+            <a:schemeClr val="accent1"/>
+          </a:effectRef>
+          <a:fontRef idx="minor">
+            <a:schemeClr val="lt1"/>
+          </a:fontRef>
+        </p:style>
+        <p:txBody>
+          <a:bodyPr rtlCol="0" anchor="ctr"/>
+          <a:lstStyle/>
+          <a:p>
+            <a:pPr algn="ctr"/>
+          </a:p>
+        </p:txBody>
+      </p:sp>
+      <p:sp>
+        <p:nvSpPr>
+          <p:cNvPr id="12" name="Rectangle 11"/>
+          <p:cNvSpPr/>
+          <p:nvPr/>
+        </p:nvSpPr>
+        <p:spPr>
+          <a:xfrm>
+            <a:off x="4206240" y="1188720"/>
+            <a:ext cx="3703320" cy="457200"/>
+          </a:xfrm>
+          <a:prstGeom prst="rect">
+            <a:avLst/>
+          </a:prstGeom>
+          <a:solidFill>
+            <a:srgbClr val="553C9A"/>
+          </a:solidFill>
+          <a:ln>
+            <a:noFill/>
+          </a:ln>
+        </p:spPr>
+        <p:style>
+          <a:lnRef idx="1">
+            <a:schemeClr val="accent1"/>
+          </a:lnRef>
+          <a:fillRef idx="3">
+            <a:schemeClr val="accent1"/>
+          </a:fillRef>
+          <a:effectRef idx="2">
+            <a:schemeClr val="accent1"/>
+          </a:effectRef>
+          <a:fontRef idx="minor">
+            <a:schemeClr val="lt1"/>
+          </a:fontRef>
+        </p:style>
+        <p:txBody>
+          <a:bodyPr rtlCol="0" anchor="ctr"/>
+          <a:lstStyle/>
+          <a:p>
+            <a:pPr algn="ctr"/>
+          </a:p>
+        </p:txBody>
+      </p:sp>
+      <p:sp>
+        <p:nvSpPr>
+          <p:cNvPr id="13" name="TextBox 12"/>
+          <p:cNvSpPr txBox="1"/>
+          <p:nvPr/>
+        </p:nvSpPr>
+        <p:spPr>
+          <a:xfrm>
+            <a:off x="4279392" y="1225296"/>
+            <a:ext cx="3547872" cy="411480"/>
+          </a:xfrm>
+          <a:prstGeom prst="rect">
+            <a:avLst/>
+          </a:prstGeom>
+          <a:noFill/>
+        </p:spPr>
+        <p:txBody>
+          <a:bodyPr wrap="square">
+            <a:spAutoFit/>
+          </a:bodyPr>
+          <a:lstStyle/>
+          <a:p>
+            <a:pPr algn="l"/>
+            <a:r>
+              <a:rPr sz="1200" b="1" i="0">
+                <a:solidFill>
+                  <a:srgbClr val="FFFFFF"/>
+                </a:solidFill>
+              </a:rPr>
+              <a:t>Medium term — Improve the gate</a:t>
+            </a:r>
+          </a:p>
+        </p:txBody>
+      </p:sp>
+      <p:sp>
+        <p:nvSpPr>
+          <p:cNvPr id="14" name="TextBox 13"/>
+          <p:cNvSpPr txBox="1"/>
+          <p:nvPr/>
+        </p:nvSpPr>
+        <p:spPr>
+          <a:xfrm>
+            <a:off x="4315968" y="1810512"/>
+            <a:ext cx="3511296" cy="713232"/>
+          </a:xfrm>
+          <a:prstGeom prst="rect">
+            <a:avLst/>
+          </a:prstGeom>
+          <a:noFill/>
+        </p:spPr>
+        <p:txBody>
+          <a:bodyPr wrap="square">
+            <a:spAutoFit/>
+          </a:bodyPr>
+          <a:lstStyle/>
+          <a:p>
+            <a:pPr algn="l"/>
+            <a:r>
+              <a:rPr sz="1150" b="0" i="0">
+                <a:solidFill>
+                  <a:srgbClr val="1A202C"/>
+                </a:solidFill>
+              </a:rPr>
+              <a:t>• LLM label-support query: ask LLM if u's text supports v's class</a:t>
+            </a:r>
+          </a:p>
+        </p:txBody>
+      </p:sp>
+      <p:sp>
+        <p:nvSpPr>
+          <p:cNvPr id="15" name="TextBox 14"/>
+          <p:cNvSpPr txBox="1"/>
+          <p:nvPr/>
+        </p:nvSpPr>
+        <p:spPr>
+          <a:xfrm>
+            <a:off x="4315968" y="2560320"/>
+            <a:ext cx="3511296" cy="713232"/>
+          </a:xfrm>
+          <a:prstGeom prst="rect">
+            <a:avLst/>
+          </a:prstGeom>
+          <a:noFill/>
+        </p:spPr>
+        <p:txBody>
+          <a:bodyPr wrap="square">
+            <a:spAutoFit/>
+          </a:bodyPr>
+          <a:lstStyle/>
+          <a:p>
+            <a:pPr algn="l"/>
+            <a:r>
+              <a:rPr sz="1150" b="0" i="0">
+                <a:solidFill>
+                  <a:srgbClr val="1A202C"/>
+                </a:solidFill>
+              </a:rPr>
+              <a:t>• Multi-hop gates: consider 2-hop neighbourhood trust</a:t>
+            </a:r>
+          </a:p>
+        </p:txBody>
+      </p:sp>
+      <p:sp>
+        <p:nvSpPr>
+          <p:cNvPr id="16" name="TextBox 15"/>
+          <p:cNvSpPr txBox="1"/>
+          <p:nvPr/>
+        </p:nvSpPr>
+        <p:spPr>
+          <a:xfrm>
+            <a:off x="4315968" y="3310128"/>
+            <a:ext cx="3511296" cy="713232"/>
+          </a:xfrm>
+          <a:prstGeom prst="rect">
+            <a:avLst/>
+          </a:prstGeom>
+          <a:noFill/>
+        </p:spPr>
+        <p:txBody>
+          <a:bodyPr wrap="square">
+            <a:spAutoFit/>
+          </a:bodyPr>
+          <a:lstStyle/>
+          <a:p>
+            <a:pPr algn="l"/>
+            <a:r>
+              <a:rPr sz="1150" b="0" i="0">
+                <a:solidFill>
+                  <a:srgbClr val="1A202C"/>
+                </a:solidFill>
+              </a:rPr>
+              <a:t>• Plug into full STEM-GNN pretrain → finetune pipeline</a:t>
+            </a:r>
+          </a:p>
+        </p:txBody>
+      </p:sp>
+      <p:sp>
+        <p:nvSpPr>
+          <p:cNvPr id="17" name="TextBox 16"/>
+          <p:cNvSpPr txBox="1"/>
+          <p:nvPr/>
+        </p:nvSpPr>
+        <p:spPr>
+          <a:xfrm>
+            <a:off x="4315968" y="4059935"/>
+            <a:ext cx="3511296" cy="713232"/>
+          </a:xfrm>
+          <a:prstGeom prst="rect">
+            <a:avLst/>
+          </a:prstGeom>
+          <a:noFill/>
+        </p:spPr>
+        <p:txBody>
+          <a:bodyPr wrap="square">
+            <a:spAutoFit/>
+          </a:bodyPr>
+          <a:lstStyle/>
+          <a:p>
+            <a:pPr algn="l"/>
+            <a:r>
+              <a:rPr sz="1150" b="0" i="0">
+                <a:solidFill>
+                  <a:srgbClr val="1A202C"/>
+                </a:solidFill>
+              </a:rPr>
+              <a:t>• Joint training of gate + VQ codebook</a:t>
+            </a:r>
+          </a:p>
+        </p:txBody>
+      </p:sp>
+      <p:sp>
+        <p:nvSpPr>
+          <p:cNvPr id="18" name="Rectangle 17"/>
+          <p:cNvSpPr/>
+          <p:nvPr/>
+        </p:nvSpPr>
+        <p:spPr>
+          <a:xfrm>
+            <a:off x="8229600" y="1188720"/>
+            <a:ext cx="3703320" cy="5029200"/>
+          </a:xfrm>
+          <a:prstGeom prst="rect">
+            <a:avLst/>
+          </a:prstGeom>
+          <a:solidFill>
+            <a:srgbClr val="F0FFF4"/>
+          </a:solidFill>
+          <a:ln w="19050">
+            <a:solidFill>
+              <a:srgbClr val="276749"/>
+            </a:solidFill>
+          </a:ln>
+        </p:spPr>
+        <p:style>
+          <a:lnRef idx="1">
+            <a:schemeClr val="accent1"/>
+          </a:lnRef>
+          <a:fillRef idx="3">
+            <a:schemeClr val="accent1"/>
+          </a:fillRef>
+          <a:effectRef idx="2">
+            <a:schemeClr val="accent1"/>
+          </a:effectRef>
+          <a:fontRef idx="minor">
+            <a:schemeClr val="lt1"/>
+          </a:fontRef>
+        </p:style>
+        <p:txBody>
+          <a:bodyPr rtlCol="0" anchor="ctr"/>
+          <a:lstStyle/>
+          <a:p>
+            <a:pPr algn="ctr"/>
+          </a:p>
+        </p:txBody>
+      </p:sp>
+      <p:sp>
+        <p:nvSpPr>
+          <p:cNvPr id="19" name="Rectangle 18"/>
+          <p:cNvSpPr/>
+          <p:nvPr/>
+        </p:nvSpPr>
+        <p:spPr>
+          <a:xfrm>
+            <a:off x="8229600" y="1188720"/>
+            <a:ext cx="3703320" cy="457200"/>
+          </a:xfrm>
+          <a:prstGeom prst="rect">
+            <a:avLst/>
+          </a:prstGeom>
+          <a:solidFill>
+            <a:srgbClr val="276749"/>
+          </a:solidFill>
+          <a:ln>
+            <a:noFill/>
+          </a:ln>
+        </p:spPr>
+        <p:style>
+          <a:lnRef idx="1">
+            <a:schemeClr val="accent1"/>
+          </a:lnRef>
+          <a:fillRef idx="3">
+            <a:schemeClr val="accent1"/>
+          </a:fillRef>
+          <a:effectRef idx="2">
+            <a:schemeClr val="accent1"/>
+          </a:effectRef>
+          <a:fontRef idx="minor">
+            <a:schemeClr val="lt1"/>
+          </a:fontRef>
+        </p:style>
+        <p:txBody>
+          <a:bodyPr rtlCol="0" anchor="ctr"/>
+          <a:lstStyle/>
+          <a:p>
+            <a:pPr algn="ctr"/>
+          </a:p>
+        </p:txBody>
+      </p:sp>
+      <p:sp>
+        <p:nvSpPr>
+          <p:cNvPr id="20" name="TextBox 19"/>
+          <p:cNvSpPr txBox="1"/>
+          <p:nvPr/>
+        </p:nvSpPr>
+        <p:spPr>
+          <a:xfrm>
+            <a:off x="8302752" y="1225296"/>
+            <a:ext cx="3547872" cy="411480"/>
+          </a:xfrm>
+          <a:prstGeom prst="rect">
+            <a:avLst/>
+          </a:prstGeom>
+          <a:noFill/>
+        </p:spPr>
+        <p:txBody>
+          <a:bodyPr wrap="square">
+            <a:spAutoFit/>
+          </a:bodyPr>
+          <a:lstStyle/>
+          <a:p>
+            <a:pPr algn="l"/>
+            <a:r>
+              <a:rPr sz="1200" b="1" i="0">
+                <a:solidFill>
+                  <a:srgbClr val="FFFFFF"/>
+                </a:solidFill>
+              </a:rPr>
+              <a:t>Long term — Research paper</a:t>
+            </a:r>
+          </a:p>
+        </p:txBody>
+      </p:sp>
+      <p:sp>
+        <p:nvSpPr>
+          <p:cNvPr id="21" name="TextBox 20"/>
+          <p:cNvSpPr txBox="1"/>
+          <p:nvPr/>
+        </p:nvSpPr>
+        <p:spPr>
+          <a:xfrm>
+            <a:off x="8339328" y="1810512"/>
+            <a:ext cx="3511296" cy="713232"/>
+          </a:xfrm>
+          <a:prstGeom prst="rect">
+            <a:avLst/>
+          </a:prstGeom>
+          <a:noFill/>
+        </p:spPr>
+        <p:txBody>
+          <a:bodyPr wrap="square">
+            <a:spAutoFit/>
+          </a:bodyPr>
+          <a:lstStyle/>
+          <a:p>
+            <a:pPr algn="l"/>
+            <a:r>
+              <a:rPr sz="1150" b="0" i="0">
+                <a:solidFill>
+                  <a:srgbClr val="1A202C"/>
+                </a:solidFill>
+              </a:rPr>
+              <a:t>• Tri-objective evaluation: ID acc / OOD robustness / transfer</a:t>
+            </a:r>
+          </a:p>
+        </p:txBody>
+      </p:sp>
+      <p:sp>
+        <p:nvSpPr>
+          <p:cNvPr id="22" name="TextBox 21"/>
+          <p:cNvSpPr txBox="1"/>
+          <p:nvPr/>
+        </p:nvSpPr>
+        <p:spPr>
+          <a:xfrm>
+            <a:off x="8339328" y="2560320"/>
+            <a:ext cx="3511296" cy="713232"/>
+          </a:xfrm>
+          <a:prstGeom prst="rect">
+            <a:avLst/>
+          </a:prstGeom>
+          <a:noFill/>
+        </p:spPr>
+        <p:txBody>
+          <a:bodyPr wrap="square">
+            <a:spAutoFit/>
+          </a:bodyPr>
+          <a:lstStyle/>
+          <a:p>
+            <a:pPr algn="l"/>
+            <a:r>
+              <a:rPr sz="1150" b="0" i="0">
+                <a:solidFill>
+                  <a:srgbClr val="1A202C"/>
+                </a:solidFill>
+              </a:rPr>
+              <a:t>• Theoretical analysis: gate as Lipschitz regulariser</a:t>
+            </a:r>
+          </a:p>
+        </p:txBody>
+      </p:sp>
+      <p:sp>
+        <p:nvSpPr>
+          <p:cNvPr id="23" name="TextBox 22"/>
+          <p:cNvSpPr txBox="1"/>
+          <p:nvPr/>
+        </p:nvSpPr>
+        <p:spPr>
+          <a:xfrm>
+            <a:off x="8339328" y="3310128"/>
+            <a:ext cx="3511296" cy="713232"/>
+          </a:xfrm>
+          <a:prstGeom prst="rect">
+            <a:avLst/>
+          </a:prstGeom>
+          <a:noFill/>
+        </p:spPr>
+        <p:txBody>
+          <a:bodyPr wrap="square">
+            <a:spAutoFit/>
+          </a:bodyPr>
+          <a:lstStyle/>
+          <a:p>
+            <a:pPr algn="l"/>
+            <a:r>
+              <a:rPr sz="1150" b="0" i="0">
+                <a:solidFill>
+                  <a:srgbClr val="1A202C"/>
+                </a:solidFill>
+              </a:rPr>
+              <a:t>• Generalise to link prediction &amp; graph classification</a:t>
+            </a:r>
+          </a:p>
+        </p:txBody>
+      </p:sp>
+      <p:sp>
+        <p:nvSpPr>
+          <p:cNvPr id="24" name="TextBox 23"/>
+          <p:cNvSpPr txBox="1"/>
+          <p:nvPr/>
+        </p:nvSpPr>
+        <p:spPr>
+          <a:xfrm>
+            <a:off x="8339328" y="4059935"/>
+            <a:ext cx="3511296" cy="713232"/>
+          </a:xfrm>
+          <a:prstGeom prst="rect">
+            <a:avLst/>
+          </a:prstGeom>
+          <a:noFill/>
+        </p:spPr>
+        <p:txBody>
+          <a:bodyPr wrap="square">
+            <a:spAutoFit/>
+          </a:bodyPr>
+          <a:lstStyle/>
+          <a:p>
+            <a:pPr algn="l"/>
+            <a:r>
+              <a:rPr sz="1150" b="0" i="0">
+                <a:solidFill>
+                  <a:srgbClr val="1A202C"/>
+                </a:solidFill>
+              </a:rPr>
+              <a:t>• Submit to NeurIPS'25 / ICLR'26</a:t>
+            </a:r>
+          </a:p>
+        </p:txBody>
+      </p:sp>
+      <p:sp>
+        <p:nvSpPr>
+          <p:cNvPr id="25" name="TextBox 24"/>
+          <p:cNvSpPr txBox="1"/>
+          <p:nvPr/>
+        </p:nvSpPr>
+        <p:spPr>
+          <a:xfrm>
+            <a:off x="182880" y="5760720"/>
+            <a:ext cx="11795760" cy="822960"/>
+          </a:xfrm>
+          <a:prstGeom prst="rect">
+            <a:avLst/>
+          </a:prstGeom>
+          <a:noFill/>
+        </p:spPr>
+        <p:txBody>
+          <a:bodyPr wrap="square">
+            <a:spAutoFit/>
+          </a:bodyPr>
+          <a:lstStyle/>
+          <a:p>
+            <a:pPr algn="ctr"/>
+            <a:r>
+              <a:rPr sz="1300" b="1" i="0">
+                <a:solidFill>
+                  <a:srgbClr val="553C9A"/>
+                </a:solidFill>
+              </a:rPr>
+              <a:t>Core claim: A semantic gate on pre-VQ LLM embeddings is a lightweight, drop-in complement to STEM-GNN that addresses both injection robustness and structural heterophily — filling a gap no existing method covers.</a:t>
+            </a:r>
+          </a:p>
+        </p:txBody>
+      </p:sp>
+    </p:spTree>
+  </p:cSld>
+  <p:clrMapOvr>
+    <a:masterClrMapping/>
+  </p:clrMapOvr>
+</p:sld>
+</file>
+
 <file path=ppt/slides/slide2.xml><?xml version="1.0" encoding="utf-8"?>
 <p:sld xmlns:a="http://schemas.openxmlformats.org/drawingml/2006/main" xmlns:p="http://schemas.openxmlformats.org/presentationml/2006/main" xmlns:r="http://schemas.openxmlformats.org/officeDocument/2006/relationships">
   <p:cSld>
@@ -6301,7 +7213,7 @@
       </p:sp>
       <p:pic>
         <p:nvPicPr>
-          <p:cNvPr id="5" name="Picture 4" descr="arch_simple.png"/>
+          <p:cNvPr id="5" name="Picture 4" descr="arch_backbone.png"/>
           <p:cNvPicPr>
             <a:picLocks noChangeAspect="1"/>
           </p:cNvPicPr>
@@ -6315,8 +7227,8 @@
         </p:blipFill>
         <p:spPr>
           <a:xfrm>
-            <a:off x="274320" y="1188720"/>
-            <a:ext cx="11612880" cy="4276010"/>
+            <a:off x="274320" y="1143000"/>
+            <a:ext cx="11612880" cy="5311317"/>
           </a:xfrm>
           <a:prstGeom prst="rect">
             <a:avLst/>
@@ -6331,8 +7243,8 @@
         </p:nvSpPr>
         <p:spPr>
           <a:xfrm>
-            <a:off x="274320" y="5897880"/>
-            <a:ext cx="11612880" cy="731520"/>
+            <a:off x="274320" y="5852160"/>
+            <a:ext cx="11612880" cy="777240"/>
           </a:xfrm>
           <a:prstGeom prst="rect">
             <a:avLst/>
@@ -6352,7 +7264,7 @@
                   <a:srgbClr val="553C9A"/>
                 </a:solidFill>
               </a:rPr>
-              <a:t>Key insight: use pre-VQ embeddings e_v (clean semantic signal) — bypassing the quantisation noise in STEM-GNN's post-VQ MoE router.</a:t>
+              <a:t>Key design: backbone (GCN/SAGE) encodes graph structure while frozen LLM embeddings act as a semantic oracle — generating β_v without entering the training signal.</a:t>
             </a:r>
           </a:p>
         </p:txBody>
@@ -8119,7 +9031,7 @@
             <a:avLst/>
           </a:prstGeom>
           <a:solidFill>
-            <a:srgbClr val="553C9A"/>
+            <a:srgbClr val="2B6CB0"/>
           </a:solidFill>
           <a:ln>
             <a:noFill/>
@@ -8176,7 +9088,7 @@
                   <a:srgbClr val="FFFFFF"/>
                 </a:solidFill>
               </a:rPr>
-              <a:t>Summary — Contribution &amp; Results</a:t>
+              <a:t>Result 3 — Backbone Comparison: GCN vs GraphSAGE + LLM gate</a:t>
             </a:r>
           </a:p>
         </p:txBody>
@@ -8210,14 +9122,14 @@
                   <a:srgbClr val="D6BCFA"/>
                 </a:solidFill>
               </a:rPr>
-              <a:t>Research gap filled + empirical evidence</a:t>
+              <a:t>LLM gate rescues GCN from −21.8 pp collapse; confidence gate matches SAGE on heterophily</a:t>
             </a:r>
           </a:p>
         </p:txBody>
       </p:sp>
       <p:pic>
         <p:nvPicPr>
-          <p:cNvPr id="5" name="Picture 4" descr="contribution_results.png"/>
+          <p:cNvPr id="5" name="Picture 4" descr="backbone_comparison.png"/>
           <p:cNvPicPr>
             <a:picLocks noChangeAspect="1"/>
           </p:cNvPicPr>
@@ -8231,14 +9143,297 @@
         </p:blipFill>
         <p:spPr>
           <a:xfrm>
-            <a:off x="137160" y="1097280"/>
-            <a:ext cx="11887200" cy="2983757"/>
+            <a:off x="274320" y="1097280"/>
+            <a:ext cx="8686800" cy="3356655"/>
           </a:xfrm>
           <a:prstGeom prst="rect">
             <a:avLst/>
           </a:prstGeom>
         </p:spPr>
       </p:pic>
+      <p:sp>
+        <p:nvSpPr>
+          <p:cNvPr id="6" name="Rectangle 5"/>
+          <p:cNvSpPr/>
+          <p:nvPr/>
+        </p:nvSpPr>
+        <p:spPr>
+          <a:xfrm>
+            <a:off x="9098280" y="1097280"/>
+            <a:ext cx="2880360" cy="5486400"/>
+          </a:xfrm>
+          <a:prstGeom prst="rect">
+            <a:avLst/>
+          </a:prstGeom>
+          <a:solidFill>
+            <a:srgbClr val="EBF4FF"/>
+          </a:solidFill>
+          <a:ln w="15240">
+            <a:solidFill>
+              <a:srgbClr val="2B6CB0"/>
+            </a:solidFill>
+          </a:ln>
+        </p:spPr>
+        <p:style>
+          <a:lnRef idx="1">
+            <a:schemeClr val="accent1"/>
+          </a:lnRef>
+          <a:fillRef idx="3">
+            <a:schemeClr val="accent1"/>
+          </a:fillRef>
+          <a:effectRef idx="2">
+            <a:schemeClr val="accent1"/>
+          </a:effectRef>
+          <a:fontRef idx="minor">
+            <a:schemeClr val="lt1"/>
+          </a:fontRef>
+        </p:style>
+        <p:txBody>
+          <a:bodyPr rtlCol="0" anchor="ctr"/>
+          <a:lstStyle/>
+          <a:p>
+            <a:pPr algn="ctr"/>
+          </a:p>
+        </p:txBody>
+      </p:sp>
+      <p:sp>
+        <p:nvSpPr>
+          <p:cNvPr id="7" name="TextBox 6"/>
+          <p:cNvSpPr txBox="1"/>
+          <p:nvPr/>
+        </p:nvSpPr>
+        <p:spPr>
+          <a:xfrm>
+            <a:off x="9189720" y="1188720"/>
+            <a:ext cx="2697480" cy="457200"/>
+          </a:xfrm>
+          <a:prstGeom prst="rect">
+            <a:avLst/>
+          </a:prstGeom>
+          <a:noFill/>
+        </p:spPr>
+        <p:txBody>
+          <a:bodyPr wrap="square">
+            <a:spAutoFit/>
+          </a:bodyPr>
+          <a:lstStyle/>
+          <a:p>
+            <a:pPr algn="l"/>
+            <a:r>
+              <a:rPr sz="1300" b="1" i="0">
+                <a:solidFill>
+                  <a:srgbClr val="2B6CB0"/>
+                </a:solidFill>
+              </a:rPr>
+              <a:t>Key Takeaways</a:t>
+            </a:r>
+          </a:p>
+        </p:txBody>
+      </p:sp>
+      <p:sp>
+        <p:nvSpPr>
+          <p:cNvPr id="8" name="TextBox 7"/>
+          <p:cNvSpPr txBox="1"/>
+          <p:nvPr/>
+        </p:nvSpPr>
+        <p:spPr>
+          <a:xfrm>
+            <a:off x="9189720" y="1737360"/>
+            <a:ext cx="2697480" cy="731520"/>
+          </a:xfrm>
+          <a:prstGeom prst="rect">
+            <a:avLst/>
+          </a:prstGeom>
+          <a:noFill/>
+        </p:spPr>
+        <p:txBody>
+          <a:bodyPr wrap="square">
+            <a:spAutoFit/>
+          </a:bodyPr>
+          <a:lstStyle/>
+          <a:p>
+            <a:pPr algn="l"/>
+            <a:r>
+              <a:rPr sz="1100" b="0" i="0">
+                <a:solidFill>
+                  <a:srgbClr val="1A202C"/>
+                </a:solidFill>
+              </a:rPr>
+              <a:t>• GCN alone: −21.8 pp drop at 50% injection (catastrophic)</a:t>
+            </a:r>
+          </a:p>
+        </p:txBody>
+      </p:sp>
+      <p:sp>
+        <p:nvSpPr>
+          <p:cNvPr id="9" name="TextBox 8"/>
+          <p:cNvSpPr txBox="1"/>
+          <p:nvPr/>
+        </p:nvSpPr>
+        <p:spPr>
+          <a:xfrm>
+            <a:off x="9189720" y="2514600"/>
+            <a:ext cx="2697480" cy="731520"/>
+          </a:xfrm>
+          <a:prstGeom prst="rect">
+            <a:avLst/>
+          </a:prstGeom>
+          <a:noFill/>
+        </p:spPr>
+        <p:txBody>
+          <a:bodyPr wrap="square">
+            <a:spAutoFit/>
+          </a:bodyPr>
+          <a:lstStyle/>
+          <a:p>
+            <a:pPr algn="l"/>
+            <a:r>
+              <a:rPr sz="1100" b="0" i="0">
+                <a:solidFill>
+                  <a:srgbClr val="1A202C"/>
+                </a:solidFill>
+              </a:rPr>
+              <a:t>• GCN + LLM gate: only −5.2 pp — gate absorbs the noise</a:t>
+            </a:r>
+          </a:p>
+        </p:txBody>
+      </p:sp>
+      <p:sp>
+        <p:nvSpPr>
+          <p:cNvPr id="10" name="TextBox 9"/>
+          <p:cNvSpPr txBox="1"/>
+          <p:nvPr/>
+        </p:nvSpPr>
+        <p:spPr>
+          <a:xfrm>
+            <a:off x="9189720" y="3291839"/>
+            <a:ext cx="2697480" cy="731520"/>
+          </a:xfrm>
+          <a:prstGeom prst="rect">
+            <a:avLst/>
+          </a:prstGeom>
+          <a:noFill/>
+        </p:spPr>
+        <p:txBody>
+          <a:bodyPr wrap="square">
+            <a:spAutoFit/>
+          </a:bodyPr>
+          <a:lstStyle/>
+          <a:p>
+            <a:pPr algn="l"/>
+            <a:r>
+              <a:rPr sz="1100" b="0" i="0">
+                <a:solidFill>
+                  <a:srgbClr val="1A202C"/>
+                </a:solidFill>
+              </a:rPr>
+              <a:t>• GCN alone weak on heterophily (44–55%)</a:t>
+            </a:r>
+          </a:p>
+        </p:txBody>
+      </p:sp>
+      <p:sp>
+        <p:nvSpPr>
+          <p:cNvPr id="11" name="TextBox 10"/>
+          <p:cNvSpPr txBox="1"/>
+          <p:nvPr/>
+        </p:nvSpPr>
+        <p:spPr>
+          <a:xfrm>
+            <a:off x="9189720" y="4069079"/>
+            <a:ext cx="2697480" cy="731520"/>
+          </a:xfrm>
+          <a:prstGeom prst="rect">
+            <a:avLst/>
+          </a:prstGeom>
+          <a:noFill/>
+        </p:spPr>
+        <p:txBody>
+          <a:bodyPr wrap="square">
+            <a:spAutoFit/>
+          </a:bodyPr>
+          <a:lstStyle/>
+          <a:p>
+            <a:pPr algn="l"/>
+            <a:r>
+              <a:rPr sz="1100" b="0" i="0">
+                <a:solidFill>
+                  <a:srgbClr val="1A202C"/>
+                </a:solidFill>
+              </a:rPr>
+              <a:t>• GCN + LLM gate recovers to 65–71%</a:t>
+            </a:r>
+          </a:p>
+        </p:txBody>
+      </p:sp>
+      <p:sp>
+        <p:nvSpPr>
+          <p:cNvPr id="12" name="TextBox 11"/>
+          <p:cNvSpPr txBox="1"/>
+          <p:nvPr/>
+        </p:nvSpPr>
+        <p:spPr>
+          <a:xfrm>
+            <a:off x="9189720" y="4846320"/>
+            <a:ext cx="2697480" cy="731520"/>
+          </a:xfrm>
+          <a:prstGeom prst="rect">
+            <a:avLst/>
+          </a:prstGeom>
+          <a:noFill/>
+        </p:spPr>
+        <p:txBody>
+          <a:bodyPr wrap="square">
+            <a:spAutoFit/>
+          </a:bodyPr>
+          <a:lstStyle/>
+          <a:p>
+            <a:pPr algn="l"/>
+            <a:r>
+              <a:rPr sz="1100" b="0" i="0">
+                <a:solidFill>
+                  <a:srgbClr val="1A202C"/>
+                </a:solidFill>
+              </a:rPr>
+              <a:t>• GCN + confidence gate matches or beats SAGE baseline</a:t>
+            </a:r>
+          </a:p>
+        </p:txBody>
+      </p:sp>
+      <p:sp>
+        <p:nvSpPr>
+          <p:cNvPr id="13" name="TextBox 12"/>
+          <p:cNvSpPr txBox="1"/>
+          <p:nvPr/>
+        </p:nvSpPr>
+        <p:spPr>
+          <a:xfrm>
+            <a:off x="9189720" y="5623560"/>
+            <a:ext cx="2697480" cy="731520"/>
+          </a:xfrm>
+          <a:prstGeom prst="rect">
+            <a:avLst/>
+          </a:prstGeom>
+          <a:noFill/>
+        </p:spPr>
+        <p:txBody>
+          <a:bodyPr wrap="square">
+            <a:spAutoFit/>
+          </a:bodyPr>
+          <a:lstStyle/>
+          <a:p>
+            <a:pPr algn="l"/>
+            <a:r>
+              <a:rPr sz="1100" b="0" i="0">
+                <a:solidFill>
+                  <a:srgbClr val="1A202C"/>
+                </a:solidFill>
+              </a:rPr>
+              <a:t>• LLM oracle signal generalises across backbone architectures</a:t>
+            </a:r>
+          </a:p>
+        </p:txBody>
+      </p:sp>
     </p:spTree>
   </p:cSld>
   <p:clrMapOvr>
@@ -8280,7 +9475,7 @@
             <a:avLst/>
           </a:prstGeom>
           <a:solidFill>
-            <a:srgbClr val="9C4221"/>
+            <a:srgbClr val="553C9A"/>
           </a:solidFill>
           <a:ln>
             <a:noFill/>
@@ -8337,109 +9532,21 @@
                   <a:srgbClr val="FFFFFF"/>
                 </a:solidFill>
               </a:rPr>
-              <a:t>Research Direction &amp; Next Steps</a:t>
-            </a:r>
-          </a:p>
-        </p:txBody>
-      </p:sp>
-      <p:sp>
-        <p:nvSpPr>
-          <p:cNvPr id="4" name="Rectangle 3"/>
-          <p:cNvSpPr/>
-          <p:nvPr/>
-        </p:nvSpPr>
-        <p:spPr>
-          <a:xfrm>
-            <a:off x="182880" y="1188720"/>
-            <a:ext cx="3703320" cy="5029200"/>
-          </a:xfrm>
-          <a:prstGeom prst="rect">
-            <a:avLst/>
-          </a:prstGeom>
-          <a:solidFill>
-            <a:srgbClr val="EBF4FF"/>
-          </a:solidFill>
-          <a:ln w="19050">
-            <a:solidFill>
-              <a:srgbClr val="2B6CB0"/>
-            </a:solidFill>
-          </a:ln>
-        </p:spPr>
-        <p:style>
-          <a:lnRef idx="1">
-            <a:schemeClr val="accent1"/>
-          </a:lnRef>
-          <a:fillRef idx="3">
-            <a:schemeClr val="accent1"/>
-          </a:fillRef>
-          <a:effectRef idx="2">
-            <a:schemeClr val="accent1"/>
-          </a:effectRef>
-          <a:fontRef idx="minor">
-            <a:schemeClr val="lt1"/>
-          </a:fontRef>
-        </p:style>
-        <p:txBody>
-          <a:bodyPr rtlCol="0" anchor="ctr"/>
-          <a:lstStyle/>
-          <a:p>
-            <a:pPr algn="ctr"/>
-          </a:p>
-        </p:txBody>
-      </p:sp>
-      <p:sp>
-        <p:nvSpPr>
-          <p:cNvPr id="5" name="Rectangle 4"/>
-          <p:cNvSpPr/>
-          <p:nvPr/>
-        </p:nvSpPr>
-        <p:spPr>
-          <a:xfrm>
-            <a:off x="182880" y="1188720"/>
-            <a:ext cx="3703320" cy="457200"/>
-          </a:xfrm>
-          <a:prstGeom prst="rect">
-            <a:avLst/>
-          </a:prstGeom>
-          <a:solidFill>
-            <a:srgbClr val="2B6CB0"/>
-          </a:solidFill>
-          <a:ln>
-            <a:noFill/>
-          </a:ln>
-        </p:spPr>
-        <p:style>
-          <a:lnRef idx="1">
-            <a:schemeClr val="accent1"/>
-          </a:lnRef>
-          <a:fillRef idx="3">
-            <a:schemeClr val="accent1"/>
-          </a:fillRef>
-          <a:effectRef idx="2">
-            <a:schemeClr val="accent1"/>
-          </a:effectRef>
-          <a:fontRef idx="minor">
-            <a:schemeClr val="lt1"/>
-          </a:fontRef>
-        </p:style>
-        <p:txBody>
-          <a:bodyPr rtlCol="0" anchor="ctr"/>
-          <a:lstStyle/>
-          <a:p>
-            <a:pPr algn="ctr"/>
-          </a:p>
-        </p:txBody>
-      </p:sp>
-      <p:sp>
-        <p:nvSpPr>
-          <p:cNvPr id="6" name="TextBox 5"/>
-          <p:cNvSpPr txBox="1"/>
-          <p:nvPr/>
-        </p:nvSpPr>
-        <p:spPr>
-          <a:xfrm>
-            <a:off x="256032" y="1225296"/>
-            <a:ext cx="3547872" cy="411480"/>
+              <a:t>Summary — Contribution &amp; Results</a:t>
+            </a:r>
+          </a:p>
+        </p:txBody>
+      </p:sp>
+      <p:sp>
+        <p:nvSpPr>
+          <p:cNvPr id="4" name="TextBox 3"/>
+          <p:cNvSpPr txBox="1"/>
+          <p:nvPr/>
+        </p:nvSpPr>
+        <p:spPr>
+          <a:xfrm>
+            <a:off x="365760" y="685800"/>
+            <a:ext cx="11430000" cy="347472"/>
           </a:xfrm>
           <a:prstGeom prst="rect">
             <a:avLst/>
@@ -8454,702 +9561,40 @@
           <a:p>
             <a:pPr algn="l"/>
             <a:r>
-              <a:rPr sz="1200" b="1" i="0">
-                <a:solidFill>
-                  <a:srgbClr val="FFFFFF"/>
-                </a:solidFill>
-              </a:rPr>
-              <a:t>Short term — Strengthen experiments</a:t>
-            </a:r>
-          </a:p>
-        </p:txBody>
-      </p:sp>
-      <p:sp>
-        <p:nvSpPr>
-          <p:cNvPr id="7" name="TextBox 6"/>
-          <p:cNvSpPr txBox="1"/>
-          <p:nvPr/>
-        </p:nvSpPr>
-        <p:spPr>
-          <a:xfrm>
-            <a:off x="292608" y="1810512"/>
-            <a:ext cx="3511296" cy="713232"/>
-          </a:xfrm>
-          <a:prstGeom prst="rect">
-            <a:avLst/>
-          </a:prstGeom>
-          <a:noFill/>
-        </p:spPr>
-        <p:txBody>
-          <a:bodyPr wrap="square">
-            <a:spAutoFit/>
-          </a:bodyPr>
-          <a:lstStyle/>
-          <a:p>
-            <a:pPr algn="l"/>
-            <a:r>
-              <a:rPr sz="1150" b="0" i="0">
-                <a:solidFill>
-                  <a:srgbClr val="1A202C"/>
-                </a:solidFill>
-              </a:rPr>
-              <a:t>• Run PubMed + WikiCS injection sweeps</a:t>
-            </a:r>
-          </a:p>
-        </p:txBody>
-      </p:sp>
-      <p:sp>
-        <p:nvSpPr>
-          <p:cNvPr id="8" name="TextBox 7"/>
-          <p:cNvSpPr txBox="1"/>
-          <p:nvPr/>
-        </p:nvSpPr>
-        <p:spPr>
-          <a:xfrm>
-            <a:off x="292608" y="2560320"/>
-            <a:ext cx="3511296" cy="713232"/>
-          </a:xfrm>
-          <a:prstGeom prst="rect">
-            <a:avLst/>
-          </a:prstGeom>
-          <a:noFill/>
-        </p:spPr>
-        <p:txBody>
-          <a:bodyPr wrap="square">
-            <a:spAutoFit/>
-          </a:bodyPr>
-          <a:lstStyle/>
-          <a:p>
-            <a:pPr algn="l"/>
-            <a:r>
-              <a:rPr sz="1150" b="0" i="0">
-                <a:solidFill>
-                  <a:srgbClr val="1A202C"/>
-                </a:solidFill>
-              </a:rPr>
-              <a:t>• Wisconsin &amp; Cornell heterophily benchmarks</a:t>
-            </a:r>
-          </a:p>
-        </p:txBody>
-      </p:sp>
-      <p:sp>
-        <p:nvSpPr>
-          <p:cNvPr id="9" name="TextBox 8"/>
-          <p:cNvSpPr txBox="1"/>
-          <p:nvPr/>
-        </p:nvSpPr>
-        <p:spPr>
-          <a:xfrm>
-            <a:off x="292608" y="3310128"/>
-            <a:ext cx="3511296" cy="713232"/>
-          </a:xfrm>
-          <a:prstGeom prst="rect">
-            <a:avLst/>
-          </a:prstGeom>
-          <a:noFill/>
-        </p:spPr>
-        <p:txBody>
-          <a:bodyPr wrap="square">
-            <a:spAutoFit/>
-          </a:bodyPr>
-          <a:lstStyle/>
-          <a:p>
-            <a:pPr algn="l"/>
-            <a:r>
-              <a:rPr sz="1150" b="0" i="0">
-                <a:solidFill>
-                  <a:srgbClr val="1A202C"/>
-                </a:solidFill>
-              </a:rPr>
-              <a:t>• Add GNNGuard as an active baseline in our injection setup</a:t>
-            </a:r>
-          </a:p>
-        </p:txBody>
-      </p:sp>
-      <p:sp>
-        <p:nvSpPr>
-          <p:cNvPr id="10" name="TextBox 9"/>
-          <p:cNvSpPr txBox="1"/>
-          <p:nvPr/>
-        </p:nvSpPr>
-        <p:spPr>
-          <a:xfrm>
-            <a:off x="292608" y="4059935"/>
-            <a:ext cx="3511296" cy="713232"/>
-          </a:xfrm>
-          <a:prstGeom prst="rect">
-            <a:avLst/>
-          </a:prstGeom>
-          <a:noFill/>
-        </p:spPr>
-        <p:txBody>
-          <a:bodyPr wrap="square">
-            <a:spAutoFit/>
-          </a:bodyPr>
-          <a:lstStyle/>
-          <a:p>
-            <a:pPr algn="l"/>
-            <a:r>
-              <a:rPr sz="1150" b="0" i="0">
-                <a:solidFill>
-                  <a:srgbClr val="1A202C"/>
-                </a:solidFill>
-              </a:rPr>
-              <a:t>• Report mean ± std over 5 seeds</a:t>
-            </a:r>
-          </a:p>
-        </p:txBody>
-      </p:sp>
-      <p:sp>
-        <p:nvSpPr>
-          <p:cNvPr id="11" name="Rectangle 10"/>
-          <p:cNvSpPr/>
-          <p:nvPr/>
-        </p:nvSpPr>
-        <p:spPr>
-          <a:xfrm>
-            <a:off x="4206240" y="1188720"/>
-            <a:ext cx="3703320" cy="5029200"/>
-          </a:xfrm>
-          <a:prstGeom prst="rect">
-            <a:avLst/>
-          </a:prstGeom>
-          <a:solidFill>
-            <a:srgbClr val="FAF5FF"/>
-          </a:solidFill>
-          <a:ln w="19050">
-            <a:solidFill>
-              <a:srgbClr val="553C9A"/>
-            </a:solidFill>
-          </a:ln>
-        </p:spPr>
-        <p:style>
-          <a:lnRef idx="1">
-            <a:schemeClr val="accent1"/>
-          </a:lnRef>
-          <a:fillRef idx="3">
-            <a:schemeClr val="accent1"/>
-          </a:fillRef>
-          <a:effectRef idx="2">
-            <a:schemeClr val="accent1"/>
-          </a:effectRef>
-          <a:fontRef idx="minor">
-            <a:schemeClr val="lt1"/>
-          </a:fontRef>
-        </p:style>
-        <p:txBody>
-          <a:bodyPr rtlCol="0" anchor="ctr"/>
-          <a:lstStyle/>
-          <a:p>
-            <a:pPr algn="ctr"/>
-          </a:p>
-        </p:txBody>
-      </p:sp>
-      <p:sp>
-        <p:nvSpPr>
-          <p:cNvPr id="12" name="Rectangle 11"/>
-          <p:cNvSpPr/>
-          <p:nvPr/>
-        </p:nvSpPr>
-        <p:spPr>
-          <a:xfrm>
-            <a:off x="4206240" y="1188720"/>
-            <a:ext cx="3703320" cy="457200"/>
-          </a:xfrm>
-          <a:prstGeom prst="rect">
-            <a:avLst/>
-          </a:prstGeom>
-          <a:solidFill>
-            <a:srgbClr val="553C9A"/>
-          </a:solidFill>
-          <a:ln>
-            <a:noFill/>
-          </a:ln>
-        </p:spPr>
-        <p:style>
-          <a:lnRef idx="1">
-            <a:schemeClr val="accent1"/>
-          </a:lnRef>
-          <a:fillRef idx="3">
-            <a:schemeClr val="accent1"/>
-          </a:fillRef>
-          <a:effectRef idx="2">
-            <a:schemeClr val="accent1"/>
-          </a:effectRef>
-          <a:fontRef idx="minor">
-            <a:schemeClr val="lt1"/>
-          </a:fontRef>
-        </p:style>
-        <p:txBody>
-          <a:bodyPr rtlCol="0" anchor="ctr"/>
-          <a:lstStyle/>
-          <a:p>
-            <a:pPr algn="ctr"/>
-          </a:p>
-        </p:txBody>
-      </p:sp>
-      <p:sp>
-        <p:nvSpPr>
-          <p:cNvPr id="13" name="TextBox 12"/>
-          <p:cNvSpPr txBox="1"/>
-          <p:nvPr/>
-        </p:nvSpPr>
-        <p:spPr>
-          <a:xfrm>
-            <a:off x="4279392" y="1225296"/>
-            <a:ext cx="3547872" cy="411480"/>
-          </a:xfrm>
-          <a:prstGeom prst="rect">
-            <a:avLst/>
-          </a:prstGeom>
-          <a:noFill/>
-        </p:spPr>
-        <p:txBody>
-          <a:bodyPr wrap="square">
-            <a:spAutoFit/>
-          </a:bodyPr>
-          <a:lstStyle/>
-          <a:p>
-            <a:pPr algn="l"/>
-            <a:r>
-              <a:rPr sz="1200" b="1" i="0">
-                <a:solidFill>
-                  <a:srgbClr val="FFFFFF"/>
-                </a:solidFill>
-              </a:rPr>
-              <a:t>Medium term — Improve the gate</a:t>
-            </a:r>
-          </a:p>
-        </p:txBody>
-      </p:sp>
-      <p:sp>
-        <p:nvSpPr>
-          <p:cNvPr id="14" name="TextBox 13"/>
-          <p:cNvSpPr txBox="1"/>
-          <p:nvPr/>
-        </p:nvSpPr>
-        <p:spPr>
-          <a:xfrm>
-            <a:off x="4315968" y="1810512"/>
-            <a:ext cx="3511296" cy="713232"/>
-          </a:xfrm>
-          <a:prstGeom prst="rect">
-            <a:avLst/>
-          </a:prstGeom>
-          <a:noFill/>
-        </p:spPr>
-        <p:txBody>
-          <a:bodyPr wrap="square">
-            <a:spAutoFit/>
-          </a:bodyPr>
-          <a:lstStyle/>
-          <a:p>
-            <a:pPr algn="l"/>
-            <a:r>
-              <a:rPr sz="1150" b="0" i="0">
-                <a:solidFill>
-                  <a:srgbClr val="1A202C"/>
-                </a:solidFill>
-              </a:rPr>
-              <a:t>• LLM label-support query: ask LLM if u's text supports v's class</a:t>
-            </a:r>
-          </a:p>
-        </p:txBody>
-      </p:sp>
-      <p:sp>
-        <p:nvSpPr>
-          <p:cNvPr id="15" name="TextBox 14"/>
-          <p:cNvSpPr txBox="1"/>
-          <p:nvPr/>
-        </p:nvSpPr>
-        <p:spPr>
-          <a:xfrm>
-            <a:off x="4315968" y="2560320"/>
-            <a:ext cx="3511296" cy="713232"/>
-          </a:xfrm>
-          <a:prstGeom prst="rect">
-            <a:avLst/>
-          </a:prstGeom>
-          <a:noFill/>
-        </p:spPr>
-        <p:txBody>
-          <a:bodyPr wrap="square">
-            <a:spAutoFit/>
-          </a:bodyPr>
-          <a:lstStyle/>
-          <a:p>
-            <a:pPr algn="l"/>
-            <a:r>
-              <a:rPr sz="1150" b="0" i="0">
-                <a:solidFill>
-                  <a:srgbClr val="1A202C"/>
-                </a:solidFill>
-              </a:rPr>
-              <a:t>• Multi-hop gates: consider 2-hop neighbourhood trust</a:t>
-            </a:r>
-          </a:p>
-        </p:txBody>
-      </p:sp>
-      <p:sp>
-        <p:nvSpPr>
-          <p:cNvPr id="16" name="TextBox 15"/>
-          <p:cNvSpPr txBox="1"/>
-          <p:nvPr/>
-        </p:nvSpPr>
-        <p:spPr>
-          <a:xfrm>
-            <a:off x="4315968" y="3310128"/>
-            <a:ext cx="3511296" cy="713232"/>
-          </a:xfrm>
-          <a:prstGeom prst="rect">
-            <a:avLst/>
-          </a:prstGeom>
-          <a:noFill/>
-        </p:spPr>
-        <p:txBody>
-          <a:bodyPr wrap="square">
-            <a:spAutoFit/>
-          </a:bodyPr>
-          <a:lstStyle/>
-          <a:p>
-            <a:pPr algn="l"/>
-            <a:r>
-              <a:rPr sz="1150" b="0" i="0">
-                <a:solidFill>
-                  <a:srgbClr val="1A202C"/>
-                </a:solidFill>
-              </a:rPr>
-              <a:t>• Plug into full STEM-GNN pretrain → finetune pipeline</a:t>
-            </a:r>
-          </a:p>
-        </p:txBody>
-      </p:sp>
-      <p:sp>
-        <p:nvSpPr>
-          <p:cNvPr id="17" name="TextBox 16"/>
-          <p:cNvSpPr txBox="1"/>
-          <p:nvPr/>
-        </p:nvSpPr>
-        <p:spPr>
-          <a:xfrm>
-            <a:off x="4315968" y="4059935"/>
-            <a:ext cx="3511296" cy="713232"/>
-          </a:xfrm>
-          <a:prstGeom prst="rect">
-            <a:avLst/>
-          </a:prstGeom>
-          <a:noFill/>
-        </p:spPr>
-        <p:txBody>
-          <a:bodyPr wrap="square">
-            <a:spAutoFit/>
-          </a:bodyPr>
-          <a:lstStyle/>
-          <a:p>
-            <a:pPr algn="l"/>
-            <a:r>
-              <a:rPr sz="1150" b="0" i="0">
-                <a:solidFill>
-                  <a:srgbClr val="1A202C"/>
-                </a:solidFill>
-              </a:rPr>
-              <a:t>• Joint training of gate + VQ codebook</a:t>
-            </a:r>
-          </a:p>
-        </p:txBody>
-      </p:sp>
-      <p:sp>
-        <p:nvSpPr>
-          <p:cNvPr id="18" name="Rectangle 17"/>
-          <p:cNvSpPr/>
-          <p:nvPr/>
-        </p:nvSpPr>
-        <p:spPr>
-          <a:xfrm>
-            <a:off x="8229600" y="1188720"/>
-            <a:ext cx="3703320" cy="5029200"/>
-          </a:xfrm>
-          <a:prstGeom prst="rect">
-            <a:avLst/>
-          </a:prstGeom>
-          <a:solidFill>
-            <a:srgbClr val="F0FFF4"/>
-          </a:solidFill>
-          <a:ln w="19050">
-            <a:solidFill>
-              <a:srgbClr val="276749"/>
-            </a:solidFill>
-          </a:ln>
-        </p:spPr>
-        <p:style>
-          <a:lnRef idx="1">
-            <a:schemeClr val="accent1"/>
-          </a:lnRef>
-          <a:fillRef idx="3">
-            <a:schemeClr val="accent1"/>
-          </a:fillRef>
-          <a:effectRef idx="2">
-            <a:schemeClr val="accent1"/>
-          </a:effectRef>
-          <a:fontRef idx="minor">
-            <a:schemeClr val="lt1"/>
-          </a:fontRef>
-        </p:style>
-        <p:txBody>
-          <a:bodyPr rtlCol="0" anchor="ctr"/>
-          <a:lstStyle/>
-          <a:p>
-            <a:pPr algn="ctr"/>
-          </a:p>
-        </p:txBody>
-      </p:sp>
-      <p:sp>
-        <p:nvSpPr>
-          <p:cNvPr id="19" name="Rectangle 18"/>
-          <p:cNvSpPr/>
-          <p:nvPr/>
-        </p:nvSpPr>
-        <p:spPr>
-          <a:xfrm>
-            <a:off x="8229600" y="1188720"/>
-            <a:ext cx="3703320" cy="457200"/>
-          </a:xfrm>
-          <a:prstGeom prst="rect">
-            <a:avLst/>
-          </a:prstGeom>
-          <a:solidFill>
-            <a:srgbClr val="276749"/>
-          </a:solidFill>
-          <a:ln>
-            <a:noFill/>
-          </a:ln>
-        </p:spPr>
-        <p:style>
-          <a:lnRef idx="1">
-            <a:schemeClr val="accent1"/>
-          </a:lnRef>
-          <a:fillRef idx="3">
-            <a:schemeClr val="accent1"/>
-          </a:fillRef>
-          <a:effectRef idx="2">
-            <a:schemeClr val="accent1"/>
-          </a:effectRef>
-          <a:fontRef idx="minor">
-            <a:schemeClr val="lt1"/>
-          </a:fontRef>
-        </p:style>
-        <p:txBody>
-          <a:bodyPr rtlCol="0" anchor="ctr"/>
-          <a:lstStyle/>
-          <a:p>
-            <a:pPr algn="ctr"/>
-          </a:p>
-        </p:txBody>
-      </p:sp>
-      <p:sp>
-        <p:nvSpPr>
-          <p:cNvPr id="20" name="TextBox 19"/>
-          <p:cNvSpPr txBox="1"/>
-          <p:nvPr/>
-        </p:nvSpPr>
-        <p:spPr>
-          <a:xfrm>
-            <a:off x="8302752" y="1225296"/>
-            <a:ext cx="3547872" cy="411480"/>
-          </a:xfrm>
-          <a:prstGeom prst="rect">
-            <a:avLst/>
-          </a:prstGeom>
-          <a:noFill/>
-        </p:spPr>
-        <p:txBody>
-          <a:bodyPr wrap="square">
-            <a:spAutoFit/>
-          </a:bodyPr>
-          <a:lstStyle/>
-          <a:p>
-            <a:pPr algn="l"/>
-            <a:r>
-              <a:rPr sz="1200" b="1" i="0">
-                <a:solidFill>
-                  <a:srgbClr val="FFFFFF"/>
-                </a:solidFill>
-              </a:rPr>
-              <a:t>Long term — Research paper</a:t>
-            </a:r>
-          </a:p>
-        </p:txBody>
-      </p:sp>
-      <p:sp>
-        <p:nvSpPr>
-          <p:cNvPr id="21" name="TextBox 20"/>
-          <p:cNvSpPr txBox="1"/>
-          <p:nvPr/>
-        </p:nvSpPr>
-        <p:spPr>
-          <a:xfrm>
-            <a:off x="8339328" y="1810512"/>
-            <a:ext cx="3511296" cy="713232"/>
-          </a:xfrm>
-          <a:prstGeom prst="rect">
-            <a:avLst/>
-          </a:prstGeom>
-          <a:noFill/>
-        </p:spPr>
-        <p:txBody>
-          <a:bodyPr wrap="square">
-            <a:spAutoFit/>
-          </a:bodyPr>
-          <a:lstStyle/>
-          <a:p>
-            <a:pPr algn="l"/>
-            <a:r>
-              <a:rPr sz="1150" b="0" i="0">
-                <a:solidFill>
-                  <a:srgbClr val="1A202C"/>
-                </a:solidFill>
-              </a:rPr>
-              <a:t>• Tri-objective evaluation: ID acc / OOD robustness / transfer</a:t>
-            </a:r>
-          </a:p>
-        </p:txBody>
-      </p:sp>
-      <p:sp>
-        <p:nvSpPr>
-          <p:cNvPr id="22" name="TextBox 21"/>
-          <p:cNvSpPr txBox="1"/>
-          <p:nvPr/>
-        </p:nvSpPr>
-        <p:spPr>
-          <a:xfrm>
-            <a:off x="8339328" y="2560320"/>
-            <a:ext cx="3511296" cy="713232"/>
-          </a:xfrm>
-          <a:prstGeom prst="rect">
-            <a:avLst/>
-          </a:prstGeom>
-          <a:noFill/>
-        </p:spPr>
-        <p:txBody>
-          <a:bodyPr wrap="square">
-            <a:spAutoFit/>
-          </a:bodyPr>
-          <a:lstStyle/>
-          <a:p>
-            <a:pPr algn="l"/>
-            <a:r>
-              <a:rPr sz="1150" b="0" i="0">
-                <a:solidFill>
-                  <a:srgbClr val="1A202C"/>
-                </a:solidFill>
-              </a:rPr>
-              <a:t>• Theoretical analysis: gate as Lipschitz regulariser</a:t>
-            </a:r>
-          </a:p>
-        </p:txBody>
-      </p:sp>
-      <p:sp>
-        <p:nvSpPr>
-          <p:cNvPr id="23" name="TextBox 22"/>
-          <p:cNvSpPr txBox="1"/>
-          <p:nvPr/>
-        </p:nvSpPr>
-        <p:spPr>
-          <a:xfrm>
-            <a:off x="8339328" y="3310128"/>
-            <a:ext cx="3511296" cy="713232"/>
-          </a:xfrm>
-          <a:prstGeom prst="rect">
-            <a:avLst/>
-          </a:prstGeom>
-          <a:noFill/>
-        </p:spPr>
-        <p:txBody>
-          <a:bodyPr wrap="square">
-            <a:spAutoFit/>
-          </a:bodyPr>
-          <a:lstStyle/>
-          <a:p>
-            <a:pPr algn="l"/>
-            <a:r>
-              <a:rPr sz="1150" b="0" i="0">
-                <a:solidFill>
-                  <a:srgbClr val="1A202C"/>
-                </a:solidFill>
-              </a:rPr>
-              <a:t>• Generalise to link prediction &amp; graph classification</a:t>
-            </a:r>
-          </a:p>
-        </p:txBody>
-      </p:sp>
-      <p:sp>
-        <p:nvSpPr>
-          <p:cNvPr id="24" name="TextBox 23"/>
-          <p:cNvSpPr txBox="1"/>
-          <p:nvPr/>
-        </p:nvSpPr>
-        <p:spPr>
-          <a:xfrm>
-            <a:off x="8339328" y="4059935"/>
-            <a:ext cx="3511296" cy="713232"/>
-          </a:xfrm>
-          <a:prstGeom prst="rect">
-            <a:avLst/>
-          </a:prstGeom>
-          <a:noFill/>
-        </p:spPr>
-        <p:txBody>
-          <a:bodyPr wrap="square">
-            <a:spAutoFit/>
-          </a:bodyPr>
-          <a:lstStyle/>
-          <a:p>
-            <a:pPr algn="l"/>
-            <a:r>
-              <a:rPr sz="1150" b="0" i="0">
-                <a:solidFill>
-                  <a:srgbClr val="1A202C"/>
-                </a:solidFill>
-              </a:rPr>
-              <a:t>• Submit to NeurIPS'25 / ICLR'26</a:t>
-            </a:r>
-          </a:p>
-        </p:txBody>
-      </p:sp>
-      <p:sp>
-        <p:nvSpPr>
-          <p:cNvPr id="25" name="TextBox 24"/>
-          <p:cNvSpPr txBox="1"/>
-          <p:nvPr/>
-        </p:nvSpPr>
-        <p:spPr>
-          <a:xfrm>
-            <a:off x="182880" y="5760720"/>
-            <a:ext cx="11795760" cy="822960"/>
-          </a:xfrm>
-          <a:prstGeom prst="rect">
-            <a:avLst/>
-          </a:prstGeom>
-          <a:noFill/>
-        </p:spPr>
-        <p:txBody>
-          <a:bodyPr wrap="square">
-            <a:spAutoFit/>
-          </a:bodyPr>
-          <a:lstStyle/>
-          <a:p>
-            <a:pPr algn="ctr"/>
-            <a:r>
-              <a:rPr sz="1300" b="1" i="0">
-                <a:solidFill>
-                  <a:srgbClr val="553C9A"/>
-                </a:solidFill>
-              </a:rPr>
-              <a:t>Core claim: A semantic gate on pre-VQ LLM embeddings is a lightweight, drop-in complement to STEM-GNN that addresses both injection robustness and structural heterophily — filling a gap no existing method covers.</a:t>
-            </a:r>
-          </a:p>
-        </p:txBody>
-      </p:sp>
+              <a:rPr sz="1400" b="0" i="0">
+                <a:solidFill>
+                  <a:srgbClr val="D6BCFA"/>
+                </a:solidFill>
+              </a:rPr>
+              <a:t>Research gap filled + empirical evidence</a:t>
+            </a:r>
+          </a:p>
+        </p:txBody>
+      </p:sp>
+      <p:pic>
+        <p:nvPicPr>
+          <p:cNvPr id="5" name="Picture 4" descr="contribution_results.png"/>
+          <p:cNvPicPr>
+            <a:picLocks noChangeAspect="1"/>
+          </p:cNvPicPr>
+          <p:nvPr/>
+        </p:nvPicPr>
+        <p:blipFill>
+          <a:blip r:embed="rId2"/>
+          <a:stretch>
+            <a:fillRect/>
+          </a:stretch>
+        </p:blipFill>
+        <p:spPr>
+          <a:xfrm>
+            <a:off x="137160" y="1097280"/>
+            <a:ext cx="11887200" cy="2983757"/>
+          </a:xfrm>
+          <a:prstGeom prst="rect">
+            <a:avLst/>
+          </a:prstGeom>
+        </p:spPr>
+      </p:pic>
     </p:spTree>
   </p:cSld>
   <p:clrMapOvr>
